--- a/assets/powerpoints/module-n2-neige/A2-an-ou-on.pptx
+++ b/assets/powerpoints/module-n2-neige/A2-an-ou-on.pptx
@@ -8806,7 +8806,43 @@
                 </a:solidFill>
                 <a:latin typeface="Verdana"/>
               </a:rPr>
-              <a:t>Pour le son de &lt;b&gt;vent&lt;/b&gt;, la bouche s'ouvre grand. Pour le son de &lt;b&gt;bonjour&lt;/b&gt;, les lèvres font un rond. C'est la bouche qui décide, pas l'oreille.</a:t>
+              <a:t>Pour le son de </a:t>
+            </a:r>
+            <a:r>
+              <a:rPr sz="2000" b="1" i="0">
+                <a:solidFill>
+                  <a:srgbClr val="4B4F52"/>
+                </a:solidFill>
+                <a:latin typeface="Verdana"/>
+              </a:rPr>
+              <a:t>vent</a:t>
+            </a:r>
+            <a:r>
+              <a:rPr sz="2000" b="0" i="0">
+                <a:solidFill>
+                  <a:srgbClr val="4B4F52"/>
+                </a:solidFill>
+                <a:latin typeface="Verdana"/>
+              </a:rPr>
+              <a:t>, la bouche s'ouvre grand. Pour le son de </a:t>
+            </a:r>
+            <a:r>
+              <a:rPr sz="2000" b="1" i="0">
+                <a:solidFill>
+                  <a:srgbClr val="4B4F52"/>
+                </a:solidFill>
+                <a:latin typeface="Verdana"/>
+              </a:rPr>
+              <a:t>bonjour</a:t>
+            </a:r>
+            <a:r>
+              <a:rPr sz="2000" b="0" i="0">
+                <a:solidFill>
+                  <a:srgbClr val="4B4F52"/>
+                </a:solidFill>
+                <a:latin typeface="Verdana"/>
+              </a:rPr>
+              <a:t>, les lèvres font un rond. C'est la bouche qui décide, pas l'oreille.</a:t>
             </a:r>
           </a:p>
         </p:txBody>
@@ -10879,7 +10915,43 @@
                 </a:solidFill>
                 <a:latin typeface="Verdana"/>
               </a:rPr>
-              <a:t>C'est la seule règle d'écriture de la séance, et elle explique six mots de l'hiver d'un coup. Elle vaut pour les deux familles : &lt;b&gt;nom&lt;/b&gt;bre, &lt;b&gt;tom&lt;/b&gt;ber.</a:t>
+              <a:t>C'est la seule règle d'écriture de la séance, et elle explique six mots de l'hiver d'un coup. Elle vaut pour les deux familles : </a:t>
+            </a:r>
+            <a:r>
+              <a:rPr sz="2000" b="1" i="0">
+                <a:solidFill>
+                  <a:srgbClr val="4B4F52"/>
+                </a:solidFill>
+                <a:latin typeface="Verdana"/>
+              </a:rPr>
+              <a:t>nom</a:t>
+            </a:r>
+            <a:r>
+              <a:rPr sz="2000" b="0" i="0">
+                <a:solidFill>
+                  <a:srgbClr val="4B4F52"/>
+                </a:solidFill>
+                <a:latin typeface="Verdana"/>
+              </a:rPr>
+              <a:t>bre, </a:t>
+            </a:r>
+            <a:r>
+              <a:rPr sz="2000" b="1" i="0">
+                <a:solidFill>
+                  <a:srgbClr val="4B4F52"/>
+                </a:solidFill>
+                <a:latin typeface="Verdana"/>
+              </a:rPr>
+              <a:t>tom</a:t>
+            </a:r>
+            <a:r>
+              <a:rPr sz="2000" b="0" i="0">
+                <a:solidFill>
+                  <a:srgbClr val="4B4F52"/>
+                </a:solidFill>
+                <a:latin typeface="Verdana"/>
+              </a:rPr>
+              <a:t>ber.</a:t>
             </a:r>
           </a:p>
         </p:txBody>
